--- a/dev/Goates_Jeremiah_Final.pptx
+++ b/dev/Goates_Jeremiah_Final.pptx
@@ -23771,7 +23771,7 @@
           <a:p>
             <a:fld id="{6444479B-705B-4489-957E-7E8A228BDFA0}" type="datetime1">
               <a:rPr lang="en-US" smtClean="0"/>
-              <a:t>4/15/2026</a:t>
+              <a:t>4/16/2026</a:t>
             </a:fld>
             <a:endParaRPr lang="en-US"/>
           </a:p>
@@ -23969,7 +23969,7 @@
           <a:p>
             <a:fld id="{C07B66AD-7C08-490A-ADA4-B47E10FB2407}" type="datetime1">
               <a:rPr lang="en-US" smtClean="0"/>
-              <a:t>4/15/2026</a:t>
+              <a:t>4/16/2026</a:t>
             </a:fld>
             <a:endParaRPr lang="en-US"/>
           </a:p>
@@ -24177,7 +24177,7 @@
           <a:p>
             <a:fld id="{05B95027-4255-49E7-9841-CD21BCC99996}" type="datetime1">
               <a:rPr lang="en-US" smtClean="0"/>
-              <a:t>4/15/2026</a:t>
+              <a:t>4/16/2026</a:t>
             </a:fld>
             <a:endParaRPr lang="en-US"/>
           </a:p>
@@ -24375,7 +24375,7 @@
           <a:p>
             <a:fld id="{9F89F774-3FA6-43B8-9241-99959C8FD463}" type="datetime1">
               <a:rPr lang="en-US" smtClean="0"/>
-              <a:t>4/15/2026</a:t>
+              <a:t>4/16/2026</a:t>
             </a:fld>
             <a:endParaRPr lang="en-US"/>
           </a:p>
@@ -24650,7 +24650,7 @@
           <a:p>
             <a:fld id="{F9504452-5DCC-4FE2-A5C9-8A5EF6714D65}" type="datetime1">
               <a:rPr lang="en-US" smtClean="0"/>
-              <a:t>4/15/2026</a:t>
+              <a:t>4/16/2026</a:t>
             </a:fld>
             <a:endParaRPr lang="en-US"/>
           </a:p>
@@ -24915,7 +24915,7 @@
           <a:p>
             <a:fld id="{E579ABC2-0180-4F3A-A895-A85BC724D472}" type="datetime1">
               <a:rPr lang="en-US" smtClean="0"/>
-              <a:t>4/15/2026</a:t>
+              <a:t>4/16/2026</a:t>
             </a:fld>
             <a:endParaRPr lang="en-US"/>
           </a:p>
@@ -25327,7 +25327,7 @@
           <a:p>
             <a:fld id="{6AEEA9BA-4E8F-439E-BEA4-91FBA01E3F5F}" type="datetime1">
               <a:rPr lang="en-US" smtClean="0"/>
-              <a:t>4/15/2026</a:t>
+              <a:t>4/16/2026</a:t>
             </a:fld>
             <a:endParaRPr lang="en-US"/>
           </a:p>
@@ -25468,7 +25468,7 @@
           <a:p>
             <a:fld id="{BE15BF18-0007-481C-AA29-413124BC3EE7}" type="datetime1">
               <a:rPr lang="en-US" smtClean="0"/>
-              <a:t>4/15/2026</a:t>
+              <a:t>4/16/2026</a:t>
             </a:fld>
             <a:endParaRPr lang="en-US"/>
           </a:p>
@@ -25581,7 +25581,7 @@
           <a:p>
             <a:fld id="{09BE9870-3748-43AD-B547-02A075CB4A1D}" type="datetime1">
               <a:rPr lang="en-US" smtClean="0"/>
-              <a:t>4/15/2026</a:t>
+              <a:t>4/16/2026</a:t>
             </a:fld>
             <a:endParaRPr lang="en-US"/>
           </a:p>
@@ -25892,7 +25892,7 @@
           <a:p>
             <a:fld id="{558E7897-33C5-4F1A-9307-D068E37F3DC7}" type="datetime1">
               <a:rPr lang="en-US" smtClean="0"/>
-              <a:t>4/15/2026</a:t>
+              <a:t>4/16/2026</a:t>
             </a:fld>
             <a:endParaRPr lang="en-US"/>
           </a:p>
@@ -26180,7 +26180,7 @@
           <a:p>
             <a:fld id="{82E171BA-CC09-47C8-A6DF-F5C5CB59CEEC}" type="datetime1">
               <a:rPr lang="en-US" smtClean="0"/>
-              <a:t>4/15/2026</a:t>
+              <a:t>4/16/2026</a:t>
             </a:fld>
             <a:endParaRPr lang="en-US"/>
           </a:p>
@@ -26421,7 +26421,7 @@
           <a:p>
             <a:fld id="{7DA38F49-B3E2-4BF0-BEC7-C30D34ABBB8D}" type="datetime1">
               <a:rPr lang="en-US" smtClean="0"/>
-              <a:t>4/15/2026</a:t>
+              <a:t>4/16/2026</a:t>
             </a:fld>
             <a:endParaRPr lang="en-US"/>
           </a:p>
@@ -27965,8 +27965,8 @@
           </p:style>
         </p:cxnSp>
       </p:grpSp>
-      <mc:AlternateContent xmlns:mc="http://schemas.openxmlformats.org/markup-compatibility/2006">
-        <mc:Choice xmlns:a14="http://schemas.microsoft.com/office/drawing/2010/main" Requires="a14">
+      <mc:AlternateContent xmlns:mc="http://schemas.openxmlformats.org/markup-compatibility/2006" xmlns:a14="http://schemas.microsoft.com/office/drawing/2010/main">
+        <mc:Choice Requires="a14">
           <p:sp>
             <p:nvSpPr>
               <p:cNvPr id="4" name="TextBox 3">
@@ -28123,7 +28123,7 @@
             </p:txBody>
           </p:sp>
         </mc:Choice>
-        <mc:Fallback>
+        <mc:Fallback xmlns="">
           <p:sp>
             <p:nvSpPr>
               <p:cNvPr id="4" name="TextBox 3">
@@ -28168,8 +28168,8 @@
           </p:sp>
         </mc:Fallback>
       </mc:AlternateContent>
-      <mc:AlternateContent xmlns:mc="http://schemas.openxmlformats.org/markup-compatibility/2006">
-        <mc:Choice xmlns:a14="http://schemas.microsoft.com/office/drawing/2010/main" Requires="a14">
+      <mc:AlternateContent xmlns:mc="http://schemas.openxmlformats.org/markup-compatibility/2006" xmlns:a14="http://schemas.microsoft.com/office/drawing/2010/main">
+        <mc:Choice Requires="a14">
           <p:sp>
             <p:nvSpPr>
               <p:cNvPr id="81" name="TextBox 80">
@@ -28238,7 +28238,7 @@
             </p:txBody>
           </p:sp>
         </mc:Choice>
-        <mc:Fallback>
+        <mc:Fallback xmlns="">
           <p:sp>
             <p:nvSpPr>
               <p:cNvPr id="81" name="TextBox 80">
@@ -28283,8 +28283,8 @@
           </p:sp>
         </mc:Fallback>
       </mc:AlternateContent>
-      <mc:AlternateContent xmlns:mc="http://schemas.openxmlformats.org/markup-compatibility/2006">
-        <mc:Choice xmlns:a14="http://schemas.microsoft.com/office/drawing/2010/main" Requires="a14">
+      <mc:AlternateContent xmlns:mc="http://schemas.openxmlformats.org/markup-compatibility/2006" xmlns:a14="http://schemas.microsoft.com/office/drawing/2010/main">
+        <mc:Choice Requires="a14">
           <p:sp>
             <p:nvSpPr>
               <p:cNvPr id="83" name="TextBox 82">
@@ -28353,7 +28353,7 @@
             </p:txBody>
           </p:sp>
         </mc:Choice>
-        <mc:Fallback>
+        <mc:Fallback xmlns="">
           <p:sp>
             <p:nvSpPr>
               <p:cNvPr id="83" name="TextBox 82">
@@ -28398,8 +28398,8 @@
           </p:sp>
         </mc:Fallback>
       </mc:AlternateContent>
-      <mc:AlternateContent xmlns:mc="http://schemas.openxmlformats.org/markup-compatibility/2006">
-        <mc:Choice xmlns:a14="http://schemas.microsoft.com/office/drawing/2010/main" Requires="a14">
+      <mc:AlternateContent xmlns:mc="http://schemas.openxmlformats.org/markup-compatibility/2006" xmlns:a14="http://schemas.microsoft.com/office/drawing/2010/main">
+        <mc:Choice Requires="a14">
           <p:sp>
             <p:nvSpPr>
               <p:cNvPr id="85" name="TextBox 84">
@@ -28458,7 +28458,7 @@
             </p:txBody>
           </p:sp>
         </mc:Choice>
-        <mc:Fallback>
+        <mc:Fallback xmlns="">
           <p:sp>
             <p:nvSpPr>
               <p:cNvPr id="85" name="TextBox 84">
@@ -28719,8 +28719,8 @@
           </a:fontRef>
         </p:style>
       </p:cxnSp>
-      <mc:AlternateContent xmlns:mc="http://schemas.openxmlformats.org/markup-compatibility/2006">
-        <mc:Choice xmlns:a14="http://schemas.microsoft.com/office/drawing/2010/main" Requires="a14">
+      <mc:AlternateContent xmlns:mc="http://schemas.openxmlformats.org/markup-compatibility/2006" xmlns:a14="http://schemas.microsoft.com/office/drawing/2010/main">
+        <mc:Choice Requires="a14">
           <p:sp>
             <p:nvSpPr>
               <p:cNvPr id="23" name="TextBox 22">
@@ -28791,7 +28791,7 @@
             </p:txBody>
           </p:sp>
         </mc:Choice>
-        <mc:Fallback>
+        <mc:Fallback xmlns="">
           <p:sp>
             <p:nvSpPr>
               <p:cNvPr id="23" name="TextBox 22">
@@ -31416,6 +31416,382 @@
           </a:fontRef>
         </p:style>
       </p:cxnSp>
+      <mc:AlternateContent xmlns:mc="http://schemas.openxmlformats.org/markup-compatibility/2006">
+        <mc:Choice xmlns:a14="http://schemas.microsoft.com/office/drawing/2010/main" Requires="a14">
+          <p:sp>
+            <p:nvSpPr>
+              <p:cNvPr id="2" name="TextBox 1">
+                <a:extLst>
+                  <a:ext uri="{FF2B5EF4-FFF2-40B4-BE49-F238E27FC236}">
+                    <a16:creationId xmlns:a16="http://schemas.microsoft.com/office/drawing/2014/main" id="{2CAF49E6-9289-7EC3-DD70-0035D6AA7BFC}"/>
+                  </a:ext>
+                </a:extLst>
+              </p:cNvPr>
+              <p:cNvSpPr txBox="1"/>
+              <p:nvPr/>
+            </p:nvSpPr>
+            <p:spPr>
+              <a:xfrm>
+                <a:off x="7973919" y="4618551"/>
+                <a:ext cx="3768663" cy="553998"/>
+              </a:xfrm>
+              <a:prstGeom prst="rect">
+                <a:avLst/>
+              </a:prstGeom>
+              <a:noFill/>
+            </p:spPr>
+            <p:txBody>
+              <a:bodyPr wrap="square" lIns="0" tIns="0" rIns="0" bIns="0" rtlCol="0">
+                <a:spAutoFit/>
+              </a:bodyPr>
+              <a:lstStyle/>
+              <a:p>
+                <a:pPr/>
+                <a14:m>
+                  <m:oMathPara xmlns:m="http://schemas.openxmlformats.org/officeDocument/2006/math">
+                    <m:oMathParaPr>
+                      <m:jc m:val="centerGroup"/>
+                    </m:oMathParaPr>
+                    <m:oMath xmlns:m="http://schemas.openxmlformats.org/officeDocument/2006/math">
+                      <m:r>
+                        <a:rPr lang="en-US" sz="3600" b="0" i="1" smtClean="0">
+                          <a:latin typeface="Cambria Math" panose="02040503050406030204" pitchFamily="18" charset="0"/>
+                        </a:rPr>
+                        <m:t>𝐹</m:t>
+                      </m:r>
+                      <m:r>
+                        <a:rPr lang="en-US" sz="3600" b="0" i="1" smtClean="0">
+                          <a:latin typeface="Cambria Math" panose="02040503050406030204" pitchFamily="18" charset="0"/>
+                        </a:rPr>
+                        <m:t>=</m:t>
+                      </m:r>
+                      <m:r>
+                        <a:rPr lang="en-US" sz="3600" b="0" i="1" smtClean="0">
+                          <a:latin typeface="Cambria Math" panose="02040503050406030204" pitchFamily="18" charset="0"/>
+                        </a:rPr>
+                        <m:t>𝑁</m:t>
+                      </m:r>
+                      <m:r>
+                        <a:rPr lang="en-US" sz="3600" b="0" i="1" smtClean="0">
+                          <a:latin typeface="Cambria Math" panose="02040503050406030204" pitchFamily="18" charset="0"/>
+                        </a:rPr>
+                        <m:t>⋅</m:t>
+                      </m:r>
+                      <m:sSub>
+                        <m:sSubPr>
+                          <m:ctrlPr>
+                            <a:rPr lang="en-US" sz="3600" b="0" i="1" smtClean="0">
+                              <a:latin typeface="Cambria Math" panose="02040503050406030204" pitchFamily="18" charset="0"/>
+                            </a:rPr>
+                          </m:ctrlPr>
+                        </m:sSubPr>
+                        <m:e>
+                          <m:acc>
+                            <m:accPr>
+                              <m:chr m:val="̂"/>
+                              <m:ctrlPr>
+                                <a:rPr lang="en-US" sz="3600" b="0" i="1" smtClean="0">
+                                  <a:latin typeface="Cambria Math" panose="02040503050406030204" pitchFamily="18" charset="0"/>
+                                </a:rPr>
+                              </m:ctrlPr>
+                            </m:accPr>
+                            <m:e>
+                              <m:r>
+                                <a:rPr lang="en-US" sz="3600" b="0" i="1" smtClean="0">
+                                  <a:latin typeface="Cambria Math" panose="02040503050406030204" pitchFamily="18" charset="0"/>
+                                </a:rPr>
+                                <m:t>𝑧</m:t>
+                              </m:r>
+                            </m:e>
+                          </m:acc>
+                        </m:e>
+                        <m:sub>
+                          <m:r>
+                            <a:rPr lang="en-US" sz="3600" b="0" i="1" smtClean="0">
+                              <a:latin typeface="Cambria Math" panose="02040503050406030204" pitchFamily="18" charset="0"/>
+                            </a:rPr>
+                            <m:t>𝑏</m:t>
+                          </m:r>
+                        </m:sub>
+                      </m:sSub>
+                    </m:oMath>
+                  </m:oMathPara>
+                </a14:m>
+                <a:endParaRPr lang="en-US" sz="3600" b="0" dirty="0"/>
+              </a:p>
+            </p:txBody>
+          </p:sp>
+        </mc:Choice>
+        <mc:Fallback>
+          <p:sp>
+            <p:nvSpPr>
+              <p:cNvPr id="2" name="TextBox 1">
+                <a:extLst>
+                  <a:ext uri="{FF2B5EF4-FFF2-40B4-BE49-F238E27FC236}">
+                    <a16:creationId xmlns:a16="http://schemas.microsoft.com/office/drawing/2014/main" id="{2CAF49E6-9289-7EC3-DD70-0035D6AA7BFC}"/>
+                  </a:ext>
+                </a:extLst>
+              </p:cNvPr>
+              <p:cNvSpPr txBox="1">
+                <a:spLocks noRot="1" noChangeAspect="1" noMove="1" noResize="1" noEditPoints="1" noAdjustHandles="1" noChangeArrowheads="1" noChangeShapeType="1" noTextEdit="1"/>
+              </p:cNvSpPr>
+              <p:nvPr/>
+            </p:nvSpPr>
+            <p:spPr>
+              <a:xfrm>
+                <a:off x="7973919" y="4618551"/>
+                <a:ext cx="3768663" cy="553998"/>
+              </a:xfrm>
+              <a:prstGeom prst="rect">
+                <a:avLst/>
+              </a:prstGeom>
+              <a:blipFill>
+                <a:blip r:embed="rId9"/>
+                <a:stretch>
+                  <a:fillRect/>
+                </a:stretch>
+              </a:blipFill>
+            </p:spPr>
+            <p:txBody>
+              <a:bodyPr/>
+              <a:lstStyle/>
+              <a:p>
+                <a:r>
+                  <a:rPr lang="en-US">
+                    <a:noFill/>
+                  </a:rPr>
+                  <a:t> </a:t>
+                </a:r>
+              </a:p>
+            </p:txBody>
+          </p:sp>
+        </mc:Fallback>
+      </mc:AlternateContent>
+      <mc:AlternateContent xmlns:mc="http://schemas.openxmlformats.org/markup-compatibility/2006">
+        <mc:Choice xmlns:a14="http://schemas.microsoft.com/office/drawing/2010/main" Requires="a14">
+          <p:sp>
+            <p:nvSpPr>
+              <p:cNvPr id="3" name="TextBox 2">
+                <a:extLst>
+                  <a:ext uri="{FF2B5EF4-FFF2-40B4-BE49-F238E27FC236}">
+                    <a16:creationId xmlns:a16="http://schemas.microsoft.com/office/drawing/2014/main" id="{7F776BEC-C691-D059-355A-E3D6105643ED}"/>
+                  </a:ext>
+                </a:extLst>
+              </p:cNvPr>
+              <p:cNvSpPr txBox="1"/>
+              <p:nvPr/>
+            </p:nvSpPr>
+            <p:spPr>
+              <a:xfrm>
+                <a:off x="8512876" y="4634549"/>
+                <a:ext cx="2832100" cy="1446165"/>
+              </a:xfrm>
+              <a:prstGeom prst="rect">
+                <a:avLst/>
+              </a:prstGeom>
+              <a:noFill/>
+            </p:spPr>
+            <p:txBody>
+              <a:bodyPr wrap="square" lIns="0" tIns="0" rIns="0" bIns="0" rtlCol="0">
+                <a:spAutoFit/>
+              </a:bodyPr>
+              <a:lstStyle/>
+              <a:p>
+                <a:pPr/>
+                <a14:m>
+                  <m:oMathPara xmlns:m="http://schemas.openxmlformats.org/officeDocument/2006/math">
+                    <m:oMathParaPr>
+                      <m:jc m:val="centerGroup"/>
+                    </m:oMathParaPr>
+                    <m:oMath xmlns:m="http://schemas.openxmlformats.org/officeDocument/2006/math">
+                      <m:r>
+                        <m:rPr>
+                          <m:sty m:val="p"/>
+                        </m:rPr>
+                        <a:rPr lang="en-US" sz="3600" b="0" i="0" smtClean="0">
+                          <a:latin typeface="Cambria Math" panose="02040503050406030204" pitchFamily="18" charset="0"/>
+                        </a:rPr>
+                        <m:t>Δ</m:t>
+                      </m:r>
+                      <m:r>
+                        <a:rPr lang="en-US" sz="3600" b="0" i="1" smtClean="0">
+                          <a:latin typeface="Cambria Math" panose="02040503050406030204" pitchFamily="18" charset="0"/>
+                        </a:rPr>
+                        <m:t>𝑧</m:t>
+                      </m:r>
+                      <m:r>
+                        <a:rPr lang="en-US" sz="3600" b="0" i="1" smtClean="0">
+                          <a:latin typeface="Cambria Math" panose="02040503050406030204" pitchFamily="18" charset="0"/>
+                        </a:rPr>
+                        <m:t>=</m:t>
+                      </m:r>
+                      <m:sSubSup>
+                        <m:sSubSupPr>
+                          <m:ctrlPr>
+                            <a:rPr lang="en-US" sz="3600" b="0" i="1" smtClean="0">
+                              <a:latin typeface="Cambria Math" panose="02040503050406030204" pitchFamily="18" charset="0"/>
+                            </a:rPr>
+                          </m:ctrlPr>
+                        </m:sSubSupPr>
+                        <m:e>
+                          <m:d>
+                            <m:dPr>
+                              <m:begChr m:val=""/>
+                              <m:ctrlPr>
+                                <a:rPr lang="en-US" sz="3600" b="0" i="1" smtClean="0">
+                                  <a:latin typeface="Cambria Math" panose="02040503050406030204" pitchFamily="18" charset="0"/>
+                                </a:rPr>
+                              </m:ctrlPr>
+                            </m:dPr>
+                            <m:e>
+                              <m:f>
+                                <m:fPr>
+                                  <m:ctrlPr>
+                                    <a:rPr lang="en-US" sz="3600" b="0" i="1">
+                                      <a:latin typeface="Cambria Math" panose="02040503050406030204" pitchFamily="18" charset="0"/>
+                                    </a:rPr>
+                                  </m:ctrlPr>
+                                </m:fPr>
+                                <m:num>
+                                  <m:sSub>
+                                    <m:sSubPr>
+                                      <m:ctrlPr>
+                                        <a:rPr lang="en-US" sz="3600" b="0" i="1">
+                                          <a:latin typeface="Cambria Math" panose="02040503050406030204" pitchFamily="18" charset="0"/>
+                                        </a:rPr>
+                                      </m:ctrlPr>
+                                    </m:sSubPr>
+                                    <m:e>
+                                      <m:r>
+                                        <a:rPr lang="en-US" sz="3600" i="1">
+                                          <a:latin typeface="Cambria Math" panose="02040503050406030204" pitchFamily="18" charset="0"/>
+                                        </a:rPr>
+                                        <m:t>𝑟</m:t>
+                                      </m:r>
+                                    </m:e>
+                                    <m:sub>
+                                      <m:r>
+                                        <a:rPr lang="en-US" sz="3600" i="1">
+                                          <a:latin typeface="Cambria Math" panose="02040503050406030204" pitchFamily="18" charset="0"/>
+                                        </a:rPr>
+                                        <m:t>𝐿𝐺</m:t>
+                                      </m:r>
+                                    </m:sub>
+                                  </m:sSub>
+                                </m:num>
+                                <m:den>
+                                  <m:sSub>
+                                    <m:sSubPr>
+                                      <m:ctrlPr>
+                                        <a:rPr lang="en-US" sz="3600" i="1">
+                                          <a:latin typeface="Cambria Math" panose="02040503050406030204" pitchFamily="18" charset="0"/>
+                                        </a:rPr>
+                                      </m:ctrlPr>
+                                    </m:sSubPr>
+                                    <m:e>
+                                      <m:acc>
+                                        <m:accPr>
+                                          <m:chr m:val="̂"/>
+                                          <m:ctrlPr>
+                                            <a:rPr lang="en-US" sz="3600" i="1">
+                                              <a:latin typeface="Cambria Math" panose="02040503050406030204" pitchFamily="18" charset="0"/>
+                                            </a:rPr>
+                                          </m:ctrlPr>
+                                        </m:accPr>
+                                        <m:e>
+                                          <m:r>
+                                            <a:rPr lang="en-US" sz="3600" i="1">
+                                              <a:latin typeface="Cambria Math" panose="02040503050406030204" pitchFamily="18" charset="0"/>
+                                            </a:rPr>
+                                            <m:t>𝑧</m:t>
+                                          </m:r>
+                                        </m:e>
+                                      </m:acc>
+                                    </m:e>
+                                    <m:sub>
+                                      <m:r>
+                                        <a:rPr lang="en-US" sz="3600" i="1">
+                                          <a:latin typeface="Cambria Math" panose="02040503050406030204" pitchFamily="18" charset="0"/>
+                                        </a:rPr>
+                                        <m:t>𝑏</m:t>
+                                      </m:r>
+                                    </m:sub>
+                                  </m:sSub>
+                                </m:den>
+                              </m:f>
+                            </m:e>
+                          </m:d>
+                        </m:e>
+                        <m:sub>
+                          <m:r>
+                            <a:rPr lang="en-US" sz="3600" b="0" i="1" smtClean="0">
+                              <a:latin typeface="Cambria Math" panose="02040503050406030204" pitchFamily="18" charset="0"/>
+                            </a:rPr>
+                            <m:t>3</m:t>
+                          </m:r>
+                        </m:sub>
+                        <m:sup>
+                          <m:r>
+                            <a:rPr lang="en-US" sz="3600" b="0" i="1" smtClean="0">
+                              <a:latin typeface="Cambria Math" panose="02040503050406030204" pitchFamily="18" charset="0"/>
+                            </a:rPr>
+                            <m:t>𝑓</m:t>
+                          </m:r>
+                        </m:sup>
+                      </m:sSubSup>
+                    </m:oMath>
+                  </m:oMathPara>
+                </a14:m>
+                <a:endParaRPr lang="en-US" sz="3600" dirty="0"/>
+              </a:p>
+            </p:txBody>
+          </p:sp>
+        </mc:Choice>
+        <mc:Fallback>
+          <p:sp>
+            <p:nvSpPr>
+              <p:cNvPr id="3" name="TextBox 2">
+                <a:extLst>
+                  <a:ext uri="{FF2B5EF4-FFF2-40B4-BE49-F238E27FC236}">
+                    <a16:creationId xmlns:a16="http://schemas.microsoft.com/office/drawing/2014/main" id="{7F776BEC-C691-D059-355A-E3D6105643ED}"/>
+                  </a:ext>
+                </a:extLst>
+              </p:cNvPr>
+              <p:cNvSpPr txBox="1">
+                <a:spLocks noRot="1" noChangeAspect="1" noMove="1" noResize="1" noEditPoints="1" noAdjustHandles="1" noChangeArrowheads="1" noChangeShapeType="1" noTextEdit="1"/>
+              </p:cNvSpPr>
+              <p:nvPr/>
+            </p:nvSpPr>
+            <p:spPr>
+              <a:xfrm>
+                <a:off x="8512876" y="4634549"/>
+                <a:ext cx="2832100" cy="1446165"/>
+              </a:xfrm>
+              <a:prstGeom prst="rect">
+                <a:avLst/>
+              </a:prstGeom>
+              <a:blipFill>
+                <a:blip r:embed="rId10"/>
+                <a:stretch>
+                  <a:fillRect/>
+                </a:stretch>
+              </a:blipFill>
+            </p:spPr>
+            <p:txBody>
+              <a:bodyPr/>
+              <a:lstStyle/>
+              <a:p>
+                <a:r>
+                  <a:rPr lang="en-US">
+                    <a:noFill/>
+                  </a:rPr>
+                  <a:t> </a:t>
+                </a:r>
+              </a:p>
+            </p:txBody>
+          </p:sp>
+        </mc:Fallback>
+      </mc:AlternateContent>
     </p:spTree>
     <p:extLst>
       <p:ext uri="{BB962C8B-B14F-4D97-AF65-F5344CB8AC3E}">
@@ -31599,6 +31975,96 @@
                                           </p:stCondLst>
                                         </p:cTn>
                                         <p:tgtEl>
+                                          <p:spTgt spid="3"/>
+                                        </p:tgtEl>
+                                        <p:attrNameLst>
+                                          <p:attrName>style.visibility</p:attrName>
+                                        </p:attrNameLst>
+                                      </p:cBhvr>
+                                      <p:to>
+                                        <p:strVal val="visible"/>
+                                      </p:to>
+                                    </p:set>
+                                  </p:childTnLst>
+                                </p:cTn>
+                              </p:par>
+                            </p:childTnLst>
+                          </p:cTn>
+                        </p:par>
+                      </p:childTnLst>
+                    </p:cTn>
+                  </p:par>
+                  <p:par>
+                    <p:cTn id="19" fill="hold">
+                      <p:stCondLst>
+                        <p:cond delay="indefinite"/>
+                      </p:stCondLst>
+                      <p:childTnLst>
+                        <p:par>
+                          <p:cTn id="20" fill="hold">
+                            <p:stCondLst>
+                              <p:cond delay="0"/>
+                            </p:stCondLst>
+                            <p:childTnLst>
+                              <p:par>
+                                <p:cTn id="21" presetID="1" presetClass="exit" presetSubtype="0" fill="hold" grpId="1" nodeType="clickEffect">
+                                  <p:stCondLst>
+                                    <p:cond delay="0"/>
+                                  </p:stCondLst>
+                                  <p:childTnLst>
+                                    <p:set>
+                                      <p:cBhvr>
+                                        <p:cTn id="22" dur="1" fill="hold">
+                                          <p:stCondLst>
+                                            <p:cond delay="0"/>
+                                          </p:stCondLst>
+                                        </p:cTn>
+                                        <p:tgtEl>
+                                          <p:spTgt spid="3"/>
+                                        </p:tgtEl>
+                                        <p:attrNameLst>
+                                          <p:attrName>style.visibility</p:attrName>
+                                        </p:attrNameLst>
+                                      </p:cBhvr>
+                                      <p:to>
+                                        <p:strVal val="hidden"/>
+                                      </p:to>
+                                    </p:set>
+                                  </p:childTnLst>
+                                </p:cTn>
+                              </p:par>
+                            </p:childTnLst>
+                          </p:cTn>
+                        </p:par>
+                      </p:childTnLst>
+                    </p:cTn>
+                  </p:par>
+                  <p:par>
+                    <p:cTn id="23" fill="hold">
+                      <p:stCondLst>
+                        <p:cond delay="indefinite"/>
+                      </p:stCondLst>
+                      <p:childTnLst>
+                        <p:par>
+                          <p:cTn id="24" fill="hold">
+                            <p:stCondLst>
+                              <p:cond delay="0"/>
+                            </p:stCondLst>
+                            <p:childTnLst>
+                              <p:par>
+                                <p:cTn id="25" presetID="1" presetClass="entr" presetSubtype="0" fill="hold" grpId="0" nodeType="clickEffect">
+                                  <p:stCondLst>
+                                    <p:cond delay="0"/>
+                                  </p:stCondLst>
+                                  <p:childTnLst>
+                                    <p:set>
+                                      <p:cBhvr>
+                                        <p:cTn id="26" dur="1" fill="hold">
+                                          <p:stCondLst>
+                                            <p:cond delay="0"/>
+                                          </p:stCondLst>
+                                        </p:cTn>
+                                        <p:tgtEl>
                                           <p:spTgt spid="96"/>
                                         </p:tgtEl>
                                         <p:attrNameLst>
@@ -31613,14 +32079,14 @@
                                 </p:cTn>
                               </p:par>
                               <p:par>
-                                <p:cTn id="19" presetID="1" presetClass="entr" presetSubtype="0" fill="hold" nodeType="withEffect">
+                                <p:cTn id="27" presetID="1" presetClass="entr" presetSubtype="0" fill="hold" nodeType="withEffect">
                                   <p:stCondLst>
                                     <p:cond delay="0"/>
                                   </p:stCondLst>
                                   <p:childTnLst>
                                     <p:set>
                                       <p:cBhvr>
-                                        <p:cTn id="20" dur="1" fill="hold">
+                                        <p:cTn id="28" dur="1" fill="hold">
                                           <p:stCondLst>
                                             <p:cond delay="0"/>
                                           </p:stCondLst>
@@ -31646,26 +32112,26 @@
                     </p:cTn>
                   </p:par>
                   <p:par>
-                    <p:cTn id="21" fill="hold">
+                    <p:cTn id="29" fill="hold">
                       <p:stCondLst>
                         <p:cond delay="indefinite"/>
                       </p:stCondLst>
                       <p:childTnLst>
                         <p:par>
-                          <p:cTn id="22" fill="hold">
+                          <p:cTn id="30" fill="hold">
                             <p:stCondLst>
                               <p:cond delay="0"/>
                             </p:stCondLst>
                             <p:childTnLst>
                               <p:par>
-                                <p:cTn id="23" presetID="1" presetClass="entr" presetSubtype="0" fill="hold" grpId="0" nodeType="clickEffect">
+                                <p:cTn id="31" presetID="1" presetClass="entr" presetSubtype="0" fill="hold" grpId="0" nodeType="clickEffect">
                                   <p:stCondLst>
                                     <p:cond delay="0"/>
                                   </p:stCondLst>
                                   <p:childTnLst>
                                     <p:set>
                                       <p:cBhvr>
-                                        <p:cTn id="24" dur="1" fill="hold">
+                                        <p:cTn id="32" dur="1" fill="hold">
                                           <p:stCondLst>
                                             <p:cond delay="0"/>
                                           </p:stCondLst>
@@ -31685,20 +32151,65 @@
                                 </p:cTn>
                               </p:par>
                               <p:par>
-                                <p:cTn id="25" presetID="1" presetClass="entr" presetSubtype="0" fill="hold" nodeType="withEffect">
+                                <p:cTn id="33" presetID="1" presetClass="entr" presetSubtype="0" fill="hold" nodeType="withEffect">
                                   <p:stCondLst>
                                     <p:cond delay="0"/>
                                   </p:stCondLst>
                                   <p:childTnLst>
                                     <p:set>
                                       <p:cBhvr>
-                                        <p:cTn id="26" dur="1" fill="hold">
+                                        <p:cTn id="34" dur="1" fill="hold">
                                           <p:stCondLst>
                                             <p:cond delay="0"/>
                                           </p:stCondLst>
                                         </p:cTn>
                                         <p:tgtEl>
                                           <p:spTgt spid="97"/>
+                                        </p:tgtEl>
+                                        <p:attrNameLst>
+                                          <p:attrName>style.visibility</p:attrName>
+                                        </p:attrNameLst>
+                                      </p:cBhvr>
+                                      <p:to>
+                                        <p:strVal val="visible"/>
+                                      </p:to>
+                                    </p:set>
+                                  </p:childTnLst>
+                                </p:cTn>
+                              </p:par>
+                            </p:childTnLst>
+                          </p:cTn>
+                        </p:par>
+                      </p:childTnLst>
+                    </p:cTn>
+                  </p:par>
+                  <p:par>
+                    <p:cTn id="35" fill="hold">
+                      <p:stCondLst>
+                        <p:cond delay="indefinite"/>
+                      </p:stCondLst>
+                      <p:childTnLst>
+                        <p:par>
+                          <p:cTn id="36" fill="hold">
+                            <p:stCondLst>
+                              <p:cond delay="0"/>
+                            </p:stCondLst>
+                            <p:childTnLst>
+                              <p:par>
+                                <p:cTn id="37" presetID="1" presetClass="entr" presetSubtype="0" fill="hold" grpId="0" nodeType="clickEffect">
+                                  <p:stCondLst>
+                                    <p:cond delay="0"/>
+                                  </p:stCondLst>
+                                  <p:childTnLst>
+                                    <p:set>
+                                      <p:cBhvr>
+                                        <p:cTn id="38" dur="1" fill="hold">
+                                          <p:stCondLst>
+                                            <p:cond delay="0"/>
+                                          </p:stCondLst>
+                                        </p:cTn>
+                                        <p:tgtEl>
+                                          <p:spTgt spid="2"/>
                                         </p:tgtEl>
                                         <p:attrNameLst>
                                           <p:attrName>style.visibility</p:attrName>
@@ -31742,6 +32253,9 @@
       <p:bldP spid="86" grpId="0"/>
       <p:bldP spid="96" grpId="0"/>
       <p:bldP spid="101" grpId="0"/>
+      <p:bldP spid="2" grpId="0"/>
+      <p:bldP spid="3" grpId="0"/>
+      <p:bldP spid="3" grpId="1"/>
     </p:bldLst>
   </p:timing>
 </p:sld>
@@ -31764,8 +32278,8 @@
           <a:chExt cx="0" cy="0"/>
         </a:xfrm>
       </p:grpSpPr>
-      <mc:AlternateContent xmlns:mc="http://schemas.openxmlformats.org/markup-compatibility/2006" xmlns:a14="http://schemas.microsoft.com/office/drawing/2010/main">
-        <mc:Choice Requires="a14">
+      <mc:AlternateContent xmlns:mc="http://schemas.openxmlformats.org/markup-compatibility/2006">
+        <mc:Choice xmlns:a14="http://schemas.microsoft.com/office/drawing/2010/main" Requires="a14">
           <p:sp>
             <p:nvSpPr>
               <p:cNvPr id="5" name="TextBox 4">
@@ -31780,7 +32294,7 @@
             </p:nvSpPr>
             <p:spPr>
               <a:xfrm>
-                <a:off x="4367474" y="3226207"/>
+                <a:off x="2615407" y="1230103"/>
                 <a:ext cx="3768663" cy="553998"/>
               </a:xfrm>
               <a:prstGeom prst="rect">
@@ -31870,7 +32384,7 @@
             </p:txBody>
           </p:sp>
         </mc:Choice>
-        <mc:Fallback xmlns="">
+        <mc:Fallback>
           <p:sp>
             <p:nvSpPr>
               <p:cNvPr id="5" name="TextBox 4">
@@ -31887,7 +32401,7 @@
             </p:nvSpPr>
             <p:spPr>
               <a:xfrm>
-                <a:off x="4367474" y="3226207"/>
+                <a:off x="2615407" y="1230103"/>
                 <a:ext cx="3768663" cy="553998"/>
               </a:xfrm>
               <a:prstGeom prst="rect">
@@ -32637,6 +33151,221 @@
           </a:graphicData>
         </a:graphic>
       </p:graphicFrame>
+      <p:graphicFrame>
+        <p:nvGraphicFramePr>
+          <p:cNvPr id="5" name="Table 4">
+            <a:extLst>
+              <a:ext uri="{FF2B5EF4-FFF2-40B4-BE49-F238E27FC236}">
+                <a16:creationId xmlns:a16="http://schemas.microsoft.com/office/drawing/2014/main" id="{6A93EC76-ACB3-0CA2-697F-0DA6A58A5F72}"/>
+              </a:ext>
+            </a:extLst>
+          </p:cNvPr>
+          <p:cNvGraphicFramePr>
+            <a:graphicFrameLocks noGrp="1"/>
+          </p:cNvGraphicFramePr>
+          <p:nvPr>
+            <p:extLst>
+              <p:ext uri="{D42A27DB-BD31-4B8C-83A1-F6EECF244321}">
+                <p14:modId xmlns:p14="http://schemas.microsoft.com/office/powerpoint/2010/main" val="505286359"/>
+              </p:ext>
+            </p:extLst>
+          </p:nvPr>
+        </p:nvGraphicFramePr>
+        <p:xfrm>
+          <a:off x="755650" y="736600"/>
+          <a:ext cx="4654550" cy="2559050"/>
+        </p:xfrm>
+        <a:graphic>
+          <a:graphicData uri="http://schemas.openxmlformats.org/drawingml/2006/table">
+            <a:tbl>
+              <a:tblPr firstRow="1" bandRow="1">
+                <a:tableStyleId>{5940675A-B579-460E-94D1-54222C63F5DA}</a:tableStyleId>
+              </a:tblPr>
+              <a:tblGrid>
+                <a:gridCol w="2902730">
+                  <a:extLst>
+                    <a:ext uri="{9D8B030D-6E8A-4147-A177-3AD203B41FA5}">
+                      <a16:colId xmlns:a16="http://schemas.microsoft.com/office/drawing/2014/main" val="3289534085"/>
+                    </a:ext>
+                  </a:extLst>
+                </a:gridCol>
+                <a:gridCol w="1751820">
+                  <a:extLst>
+                    <a:ext uri="{9D8B030D-6E8A-4147-A177-3AD203B41FA5}">
+                      <a16:colId xmlns:a16="http://schemas.microsoft.com/office/drawing/2014/main" val="3127073380"/>
+                    </a:ext>
+                  </a:extLst>
+                </a:gridCol>
+              </a:tblGrid>
+              <a:tr h="511810">
+                <a:tc>
+                  <a:txBody>
+                    <a:bodyPr/>
+                    <a:lstStyle/>
+                    <a:p>
+                      <a:r>
+                        <a:rPr lang="en-US" dirty="0"/>
+                        <a:t>Airspeed [ft/s]</a:t>
+                      </a:r>
+                    </a:p>
+                  </a:txBody>
+                  <a:tcPr/>
+                </a:tc>
+                <a:tc>
+                  <a:txBody>
+                    <a:bodyPr/>
+                    <a:lstStyle/>
+                    <a:p>
+                      <a:r>
+                        <a:rPr lang="en-US" dirty="0"/>
+                        <a:t>200</a:t>
+                      </a:r>
+                    </a:p>
+                  </a:txBody>
+                  <a:tcPr/>
+                </a:tc>
+                <a:extLst>
+                  <a:ext uri="{0D108BD9-81ED-4DB2-BD59-A6C34878D82A}">
+                    <a16:rowId xmlns:a16="http://schemas.microsoft.com/office/drawing/2014/main" val="119968124"/>
+                  </a:ext>
+                </a:extLst>
+              </a:tr>
+              <a:tr h="511810">
+                <a:tc>
+                  <a:txBody>
+                    <a:bodyPr/>
+                    <a:lstStyle/>
+                    <a:p>
+                      <a:r>
+                        <a:rPr lang="en-US" dirty="0"/>
+                        <a:t>Altitude [ft]</a:t>
+                      </a:r>
+                    </a:p>
+                  </a:txBody>
+                  <a:tcPr/>
+                </a:tc>
+                <a:tc>
+                  <a:txBody>
+                    <a:bodyPr/>
+                    <a:lstStyle/>
+                    <a:p>
+                      <a:r>
+                        <a:rPr lang="en-US" dirty="0"/>
+                        <a:t>50</a:t>
+                      </a:r>
+                    </a:p>
+                  </a:txBody>
+                  <a:tcPr/>
+                </a:tc>
+                <a:extLst>
+                  <a:ext uri="{0D108BD9-81ED-4DB2-BD59-A6C34878D82A}">
+                    <a16:rowId xmlns:a16="http://schemas.microsoft.com/office/drawing/2014/main" val="2137500195"/>
+                  </a:ext>
+                </a:extLst>
+              </a:tr>
+              <a:tr h="511810">
+                <a:tc>
+                  <a:txBody>
+                    <a:bodyPr/>
+                    <a:lstStyle/>
+                    <a:p>
+                      <a:r>
+                        <a:rPr lang="en-US" dirty="0"/>
+                        <a:t>Climb angle [deg]</a:t>
+                      </a:r>
+                    </a:p>
+                  </a:txBody>
+                  <a:tcPr/>
+                </a:tc>
+                <a:tc>
+                  <a:txBody>
+                    <a:bodyPr/>
+                    <a:lstStyle/>
+                    <a:p>
+                      <a:r>
+                        <a:rPr lang="en-US" dirty="0"/>
+                        <a:t>-5.0</a:t>
+                      </a:r>
+                    </a:p>
+                  </a:txBody>
+                  <a:tcPr/>
+                </a:tc>
+                <a:extLst>
+                  <a:ext uri="{0D108BD9-81ED-4DB2-BD59-A6C34878D82A}">
+                    <a16:rowId xmlns:a16="http://schemas.microsoft.com/office/drawing/2014/main" val="488758710"/>
+                  </a:ext>
+                </a:extLst>
+              </a:tr>
+              <a:tr h="511810">
+                <a:tc>
+                  <a:txBody>
+                    <a:bodyPr/>
+                    <a:lstStyle/>
+                    <a:p>
+                      <a:r>
+                        <a:rPr lang="en-US" dirty="0"/>
+                        <a:t>Alpha [deg]</a:t>
+                      </a:r>
+                    </a:p>
+                  </a:txBody>
+                  <a:tcPr/>
+                </a:tc>
+                <a:tc>
+                  <a:txBody>
+                    <a:bodyPr/>
+                    <a:lstStyle/>
+                    <a:p>
+                      <a:r>
+                        <a:rPr lang="en-US" dirty="0"/>
+                        <a:t>21.194</a:t>
+                      </a:r>
+                    </a:p>
+                  </a:txBody>
+                  <a:tcPr/>
+                </a:tc>
+                <a:extLst>
+                  <a:ext uri="{0D108BD9-81ED-4DB2-BD59-A6C34878D82A}">
+                    <a16:rowId xmlns:a16="http://schemas.microsoft.com/office/drawing/2014/main" val="854586632"/>
+                  </a:ext>
+                </a:extLst>
+              </a:tr>
+              <a:tr h="511810">
+                <a:tc>
+                  <a:txBody>
+                    <a:bodyPr/>
+                    <a:lstStyle/>
+                    <a:p>
+                      <a:r>
+                        <a:rPr lang="en-US" dirty="0"/>
+                        <a:t>Elevation angle</a:t>
+                      </a:r>
+                    </a:p>
+                  </a:txBody>
+                  <a:tcPr/>
+                </a:tc>
+                <a:tc>
+                  <a:txBody>
+                    <a:bodyPr/>
+                    <a:lstStyle/>
+                    <a:p>
+                      <a:r>
+                        <a:rPr lang="en-US" dirty="0"/>
+                        <a:t>16.194</a:t>
+                      </a:r>
+                    </a:p>
+                  </a:txBody>
+                  <a:tcPr/>
+                </a:tc>
+                <a:extLst>
+                  <a:ext uri="{0D108BD9-81ED-4DB2-BD59-A6C34878D82A}">
+                    <a16:rowId xmlns:a16="http://schemas.microsoft.com/office/drawing/2014/main" val="4031193370"/>
+                  </a:ext>
+                </a:extLst>
+              </a:tr>
+            </a:tbl>
+          </a:graphicData>
+        </a:graphic>
+      </p:graphicFrame>
     </p:spTree>
     <p:extLst>
       <p:ext uri="{BB962C8B-B14F-4D97-AF65-F5344CB8AC3E}">
@@ -32754,6 +33483,221 @@
         <a:graphic>
           <a:graphicData uri="http://schemas.openxmlformats.org/drawingml/2006/chart">
             <c:chart xmlns:c="http://schemas.openxmlformats.org/drawingml/2006/chart" xmlns:r="http://schemas.openxmlformats.org/officeDocument/2006/relationships" r:id="rId4"/>
+          </a:graphicData>
+        </a:graphic>
+      </p:graphicFrame>
+      <p:graphicFrame>
+        <p:nvGraphicFramePr>
+          <p:cNvPr id="5" name="Table 4">
+            <a:extLst>
+              <a:ext uri="{FF2B5EF4-FFF2-40B4-BE49-F238E27FC236}">
+                <a16:creationId xmlns:a16="http://schemas.microsoft.com/office/drawing/2014/main" id="{79AB41B5-49EB-6D26-D128-6AE2BC363AD1}"/>
+              </a:ext>
+            </a:extLst>
+          </p:cNvPr>
+          <p:cNvGraphicFramePr>
+            <a:graphicFrameLocks noGrp="1"/>
+          </p:cNvGraphicFramePr>
+          <p:nvPr>
+            <p:extLst>
+              <p:ext uri="{D42A27DB-BD31-4B8C-83A1-F6EECF244321}">
+                <p14:modId xmlns:p14="http://schemas.microsoft.com/office/powerpoint/2010/main" val="651429154"/>
+              </p:ext>
+            </p:extLst>
+          </p:nvPr>
+        </p:nvGraphicFramePr>
+        <p:xfrm>
+          <a:off x="755650" y="736600"/>
+          <a:ext cx="4654550" cy="2559050"/>
+        </p:xfrm>
+        <a:graphic>
+          <a:graphicData uri="http://schemas.openxmlformats.org/drawingml/2006/table">
+            <a:tbl>
+              <a:tblPr firstRow="1" bandRow="1">
+                <a:tableStyleId>{5940675A-B579-460E-94D1-54222C63F5DA}</a:tableStyleId>
+              </a:tblPr>
+              <a:tblGrid>
+                <a:gridCol w="2902730">
+                  <a:extLst>
+                    <a:ext uri="{9D8B030D-6E8A-4147-A177-3AD203B41FA5}">
+                      <a16:colId xmlns:a16="http://schemas.microsoft.com/office/drawing/2014/main" val="3289534085"/>
+                    </a:ext>
+                  </a:extLst>
+                </a:gridCol>
+                <a:gridCol w="1751820">
+                  <a:extLst>
+                    <a:ext uri="{9D8B030D-6E8A-4147-A177-3AD203B41FA5}">
+                      <a16:colId xmlns:a16="http://schemas.microsoft.com/office/drawing/2014/main" val="3127073380"/>
+                    </a:ext>
+                  </a:extLst>
+                </a:gridCol>
+              </a:tblGrid>
+              <a:tr h="511810">
+                <a:tc>
+                  <a:txBody>
+                    <a:bodyPr/>
+                    <a:lstStyle/>
+                    <a:p>
+                      <a:r>
+                        <a:rPr lang="en-US" dirty="0"/>
+                        <a:t>Airspeed [ft/s]</a:t>
+                      </a:r>
+                    </a:p>
+                  </a:txBody>
+                  <a:tcPr/>
+                </a:tc>
+                <a:tc>
+                  <a:txBody>
+                    <a:bodyPr/>
+                    <a:lstStyle/>
+                    <a:p>
+                      <a:r>
+                        <a:rPr lang="en-US" dirty="0"/>
+                        <a:t>200</a:t>
+                      </a:r>
+                    </a:p>
+                  </a:txBody>
+                  <a:tcPr/>
+                </a:tc>
+                <a:extLst>
+                  <a:ext uri="{0D108BD9-81ED-4DB2-BD59-A6C34878D82A}">
+                    <a16:rowId xmlns:a16="http://schemas.microsoft.com/office/drawing/2014/main" val="119968124"/>
+                  </a:ext>
+                </a:extLst>
+              </a:tr>
+              <a:tr h="511810">
+                <a:tc>
+                  <a:txBody>
+                    <a:bodyPr/>
+                    <a:lstStyle/>
+                    <a:p>
+                      <a:r>
+                        <a:rPr lang="en-US" dirty="0"/>
+                        <a:t>Altitude [ft]</a:t>
+                      </a:r>
+                    </a:p>
+                  </a:txBody>
+                  <a:tcPr/>
+                </a:tc>
+                <a:tc>
+                  <a:txBody>
+                    <a:bodyPr/>
+                    <a:lstStyle/>
+                    <a:p>
+                      <a:r>
+                        <a:rPr lang="en-US" dirty="0"/>
+                        <a:t>20</a:t>
+                      </a:r>
+                    </a:p>
+                  </a:txBody>
+                  <a:tcPr/>
+                </a:tc>
+                <a:extLst>
+                  <a:ext uri="{0D108BD9-81ED-4DB2-BD59-A6C34878D82A}">
+                    <a16:rowId xmlns:a16="http://schemas.microsoft.com/office/drawing/2014/main" val="2137500195"/>
+                  </a:ext>
+                </a:extLst>
+              </a:tr>
+              <a:tr h="511810">
+                <a:tc>
+                  <a:txBody>
+                    <a:bodyPr/>
+                    <a:lstStyle/>
+                    <a:p>
+                      <a:r>
+                        <a:rPr lang="en-US" dirty="0"/>
+                        <a:t>Climb angle [deg]</a:t>
+                      </a:r>
+                    </a:p>
+                  </a:txBody>
+                  <a:tcPr/>
+                </a:tc>
+                <a:tc>
+                  <a:txBody>
+                    <a:bodyPr/>
+                    <a:lstStyle/>
+                    <a:p>
+                      <a:r>
+                        <a:rPr lang="en-US" dirty="0"/>
+                        <a:t>-2.0</a:t>
+                      </a:r>
+                    </a:p>
+                  </a:txBody>
+                  <a:tcPr/>
+                </a:tc>
+                <a:extLst>
+                  <a:ext uri="{0D108BD9-81ED-4DB2-BD59-A6C34878D82A}">
+                    <a16:rowId xmlns:a16="http://schemas.microsoft.com/office/drawing/2014/main" val="488758710"/>
+                  </a:ext>
+                </a:extLst>
+              </a:tr>
+              <a:tr h="511810">
+                <a:tc>
+                  <a:txBody>
+                    <a:bodyPr/>
+                    <a:lstStyle/>
+                    <a:p>
+                      <a:r>
+                        <a:rPr lang="en-US" dirty="0"/>
+                        <a:t>Alpha [deg]</a:t>
+                      </a:r>
+                    </a:p>
+                  </a:txBody>
+                  <a:tcPr/>
+                </a:tc>
+                <a:tc>
+                  <a:txBody>
+                    <a:bodyPr/>
+                    <a:lstStyle/>
+                    <a:p>
+                      <a:r>
+                        <a:rPr lang="en-US" dirty="0"/>
+                        <a:t>20.883</a:t>
+                      </a:r>
+                    </a:p>
+                  </a:txBody>
+                  <a:tcPr/>
+                </a:tc>
+                <a:extLst>
+                  <a:ext uri="{0D108BD9-81ED-4DB2-BD59-A6C34878D82A}">
+                    <a16:rowId xmlns:a16="http://schemas.microsoft.com/office/drawing/2014/main" val="854586632"/>
+                  </a:ext>
+                </a:extLst>
+              </a:tr>
+              <a:tr h="511810">
+                <a:tc>
+                  <a:txBody>
+                    <a:bodyPr/>
+                    <a:lstStyle/>
+                    <a:p>
+                      <a:r>
+                        <a:rPr lang="en-US" dirty="0"/>
+                        <a:t>Elevation angle</a:t>
+                      </a:r>
+                    </a:p>
+                  </a:txBody>
+                  <a:tcPr/>
+                </a:tc>
+                <a:tc>
+                  <a:txBody>
+                    <a:bodyPr/>
+                    <a:lstStyle/>
+                    <a:p>
+                      <a:r>
+                        <a:rPr lang="en-US" dirty="0"/>
+                        <a:t>18.883</a:t>
+                      </a:r>
+                    </a:p>
+                  </a:txBody>
+                  <a:tcPr/>
+                </a:tc>
+                <a:extLst>
+                  <a:ext uri="{0D108BD9-81ED-4DB2-BD59-A6C34878D82A}">
+                    <a16:rowId xmlns:a16="http://schemas.microsoft.com/office/drawing/2014/main" val="4031193370"/>
+                  </a:ext>
+                </a:extLst>
+              </a:tr>
+            </a:tbl>
           </a:graphicData>
         </a:graphic>
       </p:graphicFrame>

--- a/dev/Goates_Jeremiah_Final.pptx
+++ b/dev/Goates_Jeremiah_Final.pptx
@@ -23771,7 +23771,7 @@
           <a:p>
             <a:fld id="{6444479B-705B-4489-957E-7E8A228BDFA0}" type="datetime1">
               <a:rPr lang="en-US" smtClean="0"/>
-              <a:t>4/16/2026</a:t>
+              <a:t>4/20/2026</a:t>
             </a:fld>
             <a:endParaRPr lang="en-US"/>
           </a:p>
@@ -23969,7 +23969,7 @@
           <a:p>
             <a:fld id="{C07B66AD-7C08-490A-ADA4-B47E10FB2407}" type="datetime1">
               <a:rPr lang="en-US" smtClean="0"/>
-              <a:t>4/16/2026</a:t>
+              <a:t>4/20/2026</a:t>
             </a:fld>
             <a:endParaRPr lang="en-US"/>
           </a:p>
@@ -24177,7 +24177,7 @@
           <a:p>
             <a:fld id="{05B95027-4255-49E7-9841-CD21BCC99996}" type="datetime1">
               <a:rPr lang="en-US" smtClean="0"/>
-              <a:t>4/16/2026</a:t>
+              <a:t>4/20/2026</a:t>
             </a:fld>
             <a:endParaRPr lang="en-US"/>
           </a:p>
@@ -24375,7 +24375,7 @@
           <a:p>
             <a:fld id="{9F89F774-3FA6-43B8-9241-99959C8FD463}" type="datetime1">
               <a:rPr lang="en-US" smtClean="0"/>
-              <a:t>4/16/2026</a:t>
+              <a:t>4/20/2026</a:t>
             </a:fld>
             <a:endParaRPr lang="en-US"/>
           </a:p>
@@ -24650,7 +24650,7 @@
           <a:p>
             <a:fld id="{F9504452-5DCC-4FE2-A5C9-8A5EF6714D65}" type="datetime1">
               <a:rPr lang="en-US" smtClean="0"/>
-              <a:t>4/16/2026</a:t>
+              <a:t>4/20/2026</a:t>
             </a:fld>
             <a:endParaRPr lang="en-US"/>
           </a:p>
@@ -24915,7 +24915,7 @@
           <a:p>
             <a:fld id="{E579ABC2-0180-4F3A-A895-A85BC724D472}" type="datetime1">
               <a:rPr lang="en-US" smtClean="0"/>
-              <a:t>4/16/2026</a:t>
+              <a:t>4/20/2026</a:t>
             </a:fld>
             <a:endParaRPr lang="en-US"/>
           </a:p>
@@ -25327,7 +25327,7 @@
           <a:p>
             <a:fld id="{6AEEA9BA-4E8F-439E-BEA4-91FBA01E3F5F}" type="datetime1">
               <a:rPr lang="en-US" smtClean="0"/>
-              <a:t>4/16/2026</a:t>
+              <a:t>4/20/2026</a:t>
             </a:fld>
             <a:endParaRPr lang="en-US"/>
           </a:p>
@@ -25468,7 +25468,7 @@
           <a:p>
             <a:fld id="{BE15BF18-0007-481C-AA29-413124BC3EE7}" type="datetime1">
               <a:rPr lang="en-US" smtClean="0"/>
-              <a:t>4/16/2026</a:t>
+              <a:t>4/20/2026</a:t>
             </a:fld>
             <a:endParaRPr lang="en-US"/>
           </a:p>
@@ -25581,7 +25581,7 @@
           <a:p>
             <a:fld id="{09BE9870-3748-43AD-B547-02A075CB4A1D}" type="datetime1">
               <a:rPr lang="en-US" smtClean="0"/>
-              <a:t>4/16/2026</a:t>
+              <a:t>4/20/2026</a:t>
             </a:fld>
             <a:endParaRPr lang="en-US"/>
           </a:p>
@@ -25892,7 +25892,7 @@
           <a:p>
             <a:fld id="{558E7897-33C5-4F1A-9307-D068E37F3DC7}" type="datetime1">
               <a:rPr lang="en-US" smtClean="0"/>
-              <a:t>4/16/2026</a:t>
+              <a:t>4/20/2026</a:t>
             </a:fld>
             <a:endParaRPr lang="en-US"/>
           </a:p>
@@ -26180,7 +26180,7 @@
           <a:p>
             <a:fld id="{82E171BA-CC09-47C8-A6DF-F5C5CB59CEEC}" type="datetime1">
               <a:rPr lang="en-US" smtClean="0"/>
-              <a:t>4/16/2026</a:t>
+              <a:t>4/20/2026</a:t>
             </a:fld>
             <a:endParaRPr lang="en-US"/>
           </a:p>
@@ -26421,7 +26421,7 @@
           <a:p>
             <a:fld id="{7DA38F49-B3E2-4BF0-BEC7-C30D34ABBB8D}" type="datetime1">
               <a:rPr lang="en-US" smtClean="0"/>
-              <a:t>4/16/2026</a:t>
+              <a:t>4/20/2026</a:t>
             </a:fld>
             <a:endParaRPr lang="en-US"/>
           </a:p>
@@ -31416,8 +31416,8 @@
           </a:fontRef>
         </p:style>
       </p:cxnSp>
-      <mc:AlternateContent xmlns:mc="http://schemas.openxmlformats.org/markup-compatibility/2006">
-        <mc:Choice xmlns:a14="http://schemas.microsoft.com/office/drawing/2010/main" Requires="a14">
+      <mc:AlternateContent xmlns:mc="http://schemas.openxmlformats.org/markup-compatibility/2006" xmlns:a14="http://schemas.microsoft.com/office/drawing/2010/main">
+        <mc:Choice Requires="a14">
           <p:sp>
             <p:nvSpPr>
               <p:cNvPr id="2" name="TextBox 1">
@@ -31522,7 +31522,7 @@
             </p:txBody>
           </p:sp>
         </mc:Choice>
-        <mc:Fallback>
+        <mc:Fallback xmlns="">
           <p:sp>
             <p:nvSpPr>
               <p:cNvPr id="2" name="TextBox 1">
@@ -31567,8 +31567,8 @@
           </p:sp>
         </mc:Fallback>
       </mc:AlternateContent>
-      <mc:AlternateContent xmlns:mc="http://schemas.openxmlformats.org/markup-compatibility/2006">
-        <mc:Choice xmlns:a14="http://schemas.microsoft.com/office/drawing/2010/main" Requires="a14">
+      <mc:AlternateContent xmlns:mc="http://schemas.openxmlformats.org/markup-compatibility/2006" xmlns:a14="http://schemas.microsoft.com/office/drawing/2010/main">
+        <mc:Choice Requires="a14">
           <p:sp>
             <p:nvSpPr>
               <p:cNvPr id="3" name="TextBox 2">
@@ -31747,7 +31747,7 @@
             </p:txBody>
           </p:sp>
         </mc:Choice>
-        <mc:Fallback>
+        <mc:Fallback xmlns="">
           <p:sp>
             <p:nvSpPr>
               <p:cNvPr id="3" name="TextBox 2">
@@ -32278,8 +32278,8 @@
           <a:chExt cx="0" cy="0"/>
         </a:xfrm>
       </p:grpSpPr>
-      <mc:AlternateContent xmlns:mc="http://schemas.openxmlformats.org/markup-compatibility/2006">
-        <mc:Choice xmlns:a14="http://schemas.microsoft.com/office/drawing/2010/main" Requires="a14">
+      <mc:AlternateContent xmlns:mc="http://schemas.openxmlformats.org/markup-compatibility/2006" xmlns:a14="http://schemas.microsoft.com/office/drawing/2010/main">
+        <mc:Choice Requires="a14">
           <p:sp>
             <p:nvSpPr>
               <p:cNvPr id="5" name="TextBox 4">
@@ -32384,7 +32384,7 @@
             </p:txBody>
           </p:sp>
         </mc:Choice>
-        <mc:Fallback>
+        <mc:Fallback xmlns="">
           <p:sp>
             <p:nvSpPr>
               <p:cNvPr id="5" name="TextBox 4">
@@ -33087,7 +33087,7 @@
         </p:xfrm>
         <a:graphic>
           <a:graphicData uri="http://schemas.openxmlformats.org/drawingml/2006/chart">
-            <c:chart xmlns:c="http://schemas.openxmlformats.org/drawingml/2006/chart" xmlns:r="http://schemas.openxmlformats.org/officeDocument/2006/relationships" r:id="rId2"/>
+            <c:chart xmlns:c="http://schemas.openxmlformats.org/drawingml/2006/chart" xmlns:r="http://schemas.openxmlformats.org/officeDocument/2006/relationships" r:id="rId4"/>
           </a:graphicData>
         </a:graphic>
       </p:graphicFrame>
@@ -33117,7 +33117,7 @@
         </p:xfrm>
         <a:graphic>
           <a:graphicData uri="http://schemas.openxmlformats.org/drawingml/2006/chart">
-            <c:chart xmlns:c="http://schemas.openxmlformats.org/drawingml/2006/chart" xmlns:r="http://schemas.openxmlformats.org/officeDocument/2006/relationships" r:id="rId3"/>
+            <c:chart xmlns:c="http://schemas.openxmlformats.org/drawingml/2006/chart" xmlns:r="http://schemas.openxmlformats.org/officeDocument/2006/relationships" r:id="rId5"/>
           </a:graphicData>
         </a:graphic>
       </p:graphicFrame>
@@ -33147,7 +33147,7 @@
         </p:xfrm>
         <a:graphic>
           <a:graphicData uri="http://schemas.openxmlformats.org/drawingml/2006/chart">
-            <c:chart xmlns:c="http://schemas.openxmlformats.org/drawingml/2006/chart" xmlns:r="http://schemas.openxmlformats.org/officeDocument/2006/relationships" r:id="rId4"/>
+            <c:chart xmlns:c="http://schemas.openxmlformats.org/drawingml/2006/chart" xmlns:r="http://schemas.openxmlformats.org/officeDocument/2006/relationships" r:id="rId6"/>
           </a:graphicData>
         </a:graphic>
       </p:graphicFrame>
@@ -33366,6 +33366,44 @@
           </a:graphicData>
         </a:graphic>
       </p:graphicFrame>
+      <p:pic>
+        <p:nvPicPr>
+          <p:cNvPr id="6" name="Goates_Jeremiah_landing_-5.0">
+            <a:hlinkClick r:id="" action="ppaction://media"/>
+            <a:extLst>
+              <a:ext uri="{FF2B5EF4-FFF2-40B4-BE49-F238E27FC236}">
+                <a16:creationId xmlns:a16="http://schemas.microsoft.com/office/drawing/2014/main" id="{A1A667CF-B1E0-56D1-70C5-240E4B6995A6}"/>
+              </a:ext>
+            </a:extLst>
+          </p:cNvPr>
+          <p:cNvPicPr>
+            <a:picLocks noChangeAspect="1"/>
+          </p:cNvPicPr>
+          <p:nvPr>
+            <a:videoFile r:link="rId2"/>
+            <p:extLst>
+              <p:ext uri="{DAA4B4D4-6D71-4841-9C94-3DE7FCFB9230}">
+                <p14:media xmlns:p14="http://schemas.microsoft.com/office/powerpoint/2010/main" r:embed="rId1"/>
+              </p:ext>
+            </p:extLst>
+          </p:nvPr>
+        </p:nvPicPr>
+        <p:blipFill>
+          <a:blip r:embed="rId7"/>
+          <a:stretch>
+            <a:fillRect/>
+          </a:stretch>
+        </p:blipFill>
+        <p:spPr>
+          <a:xfrm>
+            <a:off x="6095997" y="64961"/>
+            <a:ext cx="5840419" cy="3299079"/>
+          </a:xfrm>
+          <a:prstGeom prst="rect">
+            <a:avLst/>
+          </a:prstGeom>
+        </p:spPr>
+      </p:pic>
     </p:spTree>
     <p:extLst>
       <p:ext uri="{BB962C8B-B14F-4D97-AF65-F5344CB8AC3E}">
@@ -33376,6 +33414,141 @@
   <p:clrMapOvr>
     <a:masterClrMapping/>
   </p:clrMapOvr>
+  <p:timing>
+    <p:tnLst>
+      <p:par>
+        <p:cTn id="1" dur="indefinite" restart="never" nodeType="tmRoot">
+          <p:childTnLst>
+            <p:seq concurrent="1" nextAc="seek">
+              <p:cTn id="2" dur="indefinite" nodeType="mainSeq">
+                <p:childTnLst>
+                  <p:par>
+                    <p:cTn id="3" fill="hold">
+                      <p:stCondLst>
+                        <p:cond delay="indefinite"/>
+                      </p:stCondLst>
+                      <p:childTnLst>
+                        <p:par>
+                          <p:cTn id="4" fill="hold">
+                            <p:stCondLst>
+                              <p:cond delay="0"/>
+                            </p:stCondLst>
+                            <p:childTnLst>
+                              <p:par>
+                                <p:cTn id="5" presetID="1" presetClass="mediacall" presetSubtype="0" fill="hold" nodeType="clickEffect">
+                                  <p:stCondLst>
+                                    <p:cond delay="0"/>
+                                  </p:stCondLst>
+                                  <p:childTnLst>
+                                    <p:cmd type="call" cmd="playFrom(0.0)">
+                                      <p:cBhvr>
+                                        <p:cTn id="6" dur="4863" fill="hold"/>
+                                        <p:tgtEl>
+                                          <p:spTgt spid="6"/>
+                                        </p:tgtEl>
+                                      </p:cBhvr>
+                                    </p:cmd>
+                                  </p:childTnLst>
+                                </p:cTn>
+                              </p:par>
+                            </p:childTnLst>
+                          </p:cTn>
+                        </p:par>
+                      </p:childTnLst>
+                    </p:cTn>
+                  </p:par>
+                </p:childTnLst>
+              </p:cTn>
+              <p:prevCondLst>
+                <p:cond evt="onPrev" delay="0">
+                  <p:tgtEl>
+                    <p:sldTgt/>
+                  </p:tgtEl>
+                </p:cond>
+              </p:prevCondLst>
+              <p:nextCondLst>
+                <p:cond evt="onNext" delay="0">
+                  <p:tgtEl>
+                    <p:sldTgt/>
+                  </p:tgtEl>
+                </p:cond>
+              </p:nextCondLst>
+            </p:seq>
+            <p:video>
+              <p:cMediaNode vol="80000">
+                <p:cTn id="7" repeatCount="indefinite" fill="hold" display="0">
+                  <p:stCondLst>
+                    <p:cond delay="indefinite"/>
+                  </p:stCondLst>
+                </p:cTn>
+                <p:tgtEl>
+                  <p:spTgt spid="6"/>
+                </p:tgtEl>
+              </p:cMediaNode>
+            </p:video>
+            <p:seq concurrent="1" nextAc="seek">
+              <p:cTn id="8" restart="whenNotActive" fill="hold" evtFilter="cancelBubble" nodeType="interactiveSeq">
+                <p:stCondLst>
+                  <p:cond evt="onClick" delay="0">
+                    <p:tgtEl>
+                      <p:spTgt spid="6"/>
+                    </p:tgtEl>
+                  </p:cond>
+                </p:stCondLst>
+                <p:endSync evt="end" delay="0">
+                  <p:rtn val="all"/>
+                </p:endSync>
+                <p:childTnLst>
+                  <p:par>
+                    <p:cTn id="9" fill="hold">
+                      <p:stCondLst>
+                        <p:cond delay="0"/>
+                      </p:stCondLst>
+                      <p:childTnLst>
+                        <p:par>
+                          <p:cTn id="10" fill="hold">
+                            <p:stCondLst>
+                              <p:cond delay="0"/>
+                            </p:stCondLst>
+                            <p:childTnLst>
+                              <p:par>
+                                <p:cTn id="11" presetID="2" presetClass="mediacall" presetSubtype="0" fill="hold" nodeType="clickEffect">
+                                  <p:stCondLst>
+                                    <p:cond delay="0"/>
+                                  </p:stCondLst>
+                                  <p:childTnLst>
+                                    <p:cmd type="call" cmd="togglePause">
+                                      <p:cBhvr>
+                                        <p:cTn id="12" dur="1" fill="hold"/>
+                                        <p:tgtEl>
+                                          <p:spTgt spid="6"/>
+                                        </p:tgtEl>
+                                      </p:cBhvr>
+                                    </p:cmd>
+                                  </p:childTnLst>
+                                </p:cTn>
+                              </p:par>
+                            </p:childTnLst>
+                          </p:cTn>
+                        </p:par>
+                      </p:childTnLst>
+                    </p:cTn>
+                  </p:par>
+                </p:childTnLst>
+              </p:cTn>
+              <p:nextCondLst>
+                <p:cond evt="onClick" delay="0">
+                  <p:tgtEl>
+                    <p:spTgt spid="6"/>
+                  </p:tgtEl>
+                </p:cond>
+              </p:nextCondLst>
+            </p:seq>
+          </p:childTnLst>
+        </p:cTn>
+      </p:par>
+    </p:tnLst>
+  </p:timing>
 </p:sld>
 </file>
 
@@ -33422,7 +33595,7 @@
         </p:xfrm>
         <a:graphic>
           <a:graphicData uri="http://schemas.openxmlformats.org/drawingml/2006/chart">
-            <c:chart xmlns:c="http://schemas.openxmlformats.org/drawingml/2006/chart" xmlns:r="http://schemas.openxmlformats.org/officeDocument/2006/relationships" r:id="rId2"/>
+            <c:chart xmlns:c="http://schemas.openxmlformats.org/drawingml/2006/chart" xmlns:r="http://schemas.openxmlformats.org/officeDocument/2006/relationships" r:id="rId4"/>
           </a:graphicData>
         </a:graphic>
       </p:graphicFrame>
@@ -33452,7 +33625,7 @@
         </p:xfrm>
         <a:graphic>
           <a:graphicData uri="http://schemas.openxmlformats.org/drawingml/2006/chart">
-            <c:chart xmlns:c="http://schemas.openxmlformats.org/drawingml/2006/chart" xmlns:r="http://schemas.openxmlformats.org/officeDocument/2006/relationships" r:id="rId3"/>
+            <c:chart xmlns:c="http://schemas.openxmlformats.org/drawingml/2006/chart" xmlns:r="http://schemas.openxmlformats.org/officeDocument/2006/relationships" r:id="rId5"/>
           </a:graphicData>
         </a:graphic>
       </p:graphicFrame>
@@ -33482,7 +33655,7 @@
         </p:xfrm>
         <a:graphic>
           <a:graphicData uri="http://schemas.openxmlformats.org/drawingml/2006/chart">
-            <c:chart xmlns:c="http://schemas.openxmlformats.org/drawingml/2006/chart" xmlns:r="http://schemas.openxmlformats.org/officeDocument/2006/relationships" r:id="rId4"/>
+            <c:chart xmlns:c="http://schemas.openxmlformats.org/drawingml/2006/chart" xmlns:r="http://schemas.openxmlformats.org/officeDocument/2006/relationships" r:id="rId6"/>
           </a:graphicData>
         </a:graphic>
       </p:graphicFrame>
@@ -33701,6 +33874,44 @@
           </a:graphicData>
         </a:graphic>
       </p:graphicFrame>
+      <p:pic>
+        <p:nvPicPr>
+          <p:cNvPr id="6" name="Goates_Jeremiah_landing_-2.0">
+            <a:hlinkClick r:id="" action="ppaction://media"/>
+            <a:extLst>
+              <a:ext uri="{FF2B5EF4-FFF2-40B4-BE49-F238E27FC236}">
+                <a16:creationId xmlns:a16="http://schemas.microsoft.com/office/drawing/2014/main" id="{08030154-ED45-8F1F-4DBA-17FAE316520D}"/>
+              </a:ext>
+            </a:extLst>
+          </p:cNvPr>
+          <p:cNvPicPr>
+            <a:picLocks noChangeAspect="1"/>
+          </p:cNvPicPr>
+          <p:nvPr>
+            <a:videoFile r:link="rId2"/>
+            <p:extLst>
+              <p:ext uri="{DAA4B4D4-6D71-4841-9C94-3DE7FCFB9230}">
+                <p14:media xmlns:p14="http://schemas.microsoft.com/office/powerpoint/2010/main" r:embed="rId1"/>
+              </p:ext>
+            </p:extLst>
+          </p:nvPr>
+        </p:nvPicPr>
+        <p:blipFill>
+          <a:blip r:embed="rId7"/>
+          <a:stretch>
+            <a:fillRect/>
+          </a:stretch>
+        </p:blipFill>
+        <p:spPr>
+          <a:xfrm>
+            <a:off x="6096000" y="19209"/>
+            <a:ext cx="5800344" cy="3276442"/>
+          </a:xfrm>
+          <a:prstGeom prst="rect">
+            <a:avLst/>
+          </a:prstGeom>
+        </p:spPr>
+      </p:pic>
     </p:spTree>
     <p:extLst>
       <p:ext uri="{BB962C8B-B14F-4D97-AF65-F5344CB8AC3E}">
@@ -33711,6 +33922,141 @@
   <p:clrMapOvr>
     <a:masterClrMapping/>
   </p:clrMapOvr>
+  <p:timing>
+    <p:tnLst>
+      <p:par>
+        <p:cTn id="1" dur="indefinite" restart="never" nodeType="tmRoot">
+          <p:childTnLst>
+            <p:seq concurrent="1" nextAc="seek">
+              <p:cTn id="2" dur="indefinite" nodeType="mainSeq">
+                <p:childTnLst>
+                  <p:par>
+                    <p:cTn id="3" fill="hold">
+                      <p:stCondLst>
+                        <p:cond delay="indefinite"/>
+                      </p:stCondLst>
+                      <p:childTnLst>
+                        <p:par>
+                          <p:cTn id="4" fill="hold">
+                            <p:stCondLst>
+                              <p:cond delay="0"/>
+                            </p:stCondLst>
+                            <p:childTnLst>
+                              <p:par>
+                                <p:cTn id="5" presetID="1" presetClass="mediacall" presetSubtype="0" fill="hold" nodeType="clickEffect">
+                                  <p:stCondLst>
+                                    <p:cond delay="0"/>
+                                  </p:stCondLst>
+                                  <p:childTnLst>
+                                    <p:cmd type="call" cmd="playFrom(0.0)">
+                                      <p:cBhvr>
+                                        <p:cTn id="6" dur="4586" fill="hold"/>
+                                        <p:tgtEl>
+                                          <p:spTgt spid="6"/>
+                                        </p:tgtEl>
+                                      </p:cBhvr>
+                                    </p:cmd>
+                                  </p:childTnLst>
+                                </p:cTn>
+                              </p:par>
+                            </p:childTnLst>
+                          </p:cTn>
+                        </p:par>
+                      </p:childTnLst>
+                    </p:cTn>
+                  </p:par>
+                </p:childTnLst>
+              </p:cTn>
+              <p:prevCondLst>
+                <p:cond evt="onPrev" delay="0">
+                  <p:tgtEl>
+                    <p:sldTgt/>
+                  </p:tgtEl>
+                </p:cond>
+              </p:prevCondLst>
+              <p:nextCondLst>
+                <p:cond evt="onNext" delay="0">
+                  <p:tgtEl>
+                    <p:sldTgt/>
+                  </p:tgtEl>
+                </p:cond>
+              </p:nextCondLst>
+            </p:seq>
+            <p:video>
+              <p:cMediaNode vol="80000">
+                <p:cTn id="7" fill="hold" display="0">
+                  <p:stCondLst>
+                    <p:cond delay="indefinite"/>
+                  </p:stCondLst>
+                </p:cTn>
+                <p:tgtEl>
+                  <p:spTgt spid="6"/>
+                </p:tgtEl>
+              </p:cMediaNode>
+            </p:video>
+            <p:seq concurrent="1" nextAc="seek">
+              <p:cTn id="8" restart="whenNotActive" fill="hold" evtFilter="cancelBubble" nodeType="interactiveSeq">
+                <p:stCondLst>
+                  <p:cond evt="onClick" delay="0">
+                    <p:tgtEl>
+                      <p:spTgt spid="6"/>
+                    </p:tgtEl>
+                  </p:cond>
+                </p:stCondLst>
+                <p:endSync evt="end" delay="0">
+                  <p:rtn val="all"/>
+                </p:endSync>
+                <p:childTnLst>
+                  <p:par>
+                    <p:cTn id="9" fill="hold">
+                      <p:stCondLst>
+                        <p:cond delay="0"/>
+                      </p:stCondLst>
+                      <p:childTnLst>
+                        <p:par>
+                          <p:cTn id="10" fill="hold">
+                            <p:stCondLst>
+                              <p:cond delay="0"/>
+                            </p:stCondLst>
+                            <p:childTnLst>
+                              <p:par>
+                                <p:cTn id="11" presetID="2" presetClass="mediacall" presetSubtype="0" fill="hold" nodeType="clickEffect">
+                                  <p:stCondLst>
+                                    <p:cond delay="0"/>
+                                  </p:stCondLst>
+                                  <p:childTnLst>
+                                    <p:cmd type="call" cmd="togglePause">
+                                      <p:cBhvr>
+                                        <p:cTn id="12" dur="1" fill="hold"/>
+                                        <p:tgtEl>
+                                          <p:spTgt spid="6"/>
+                                        </p:tgtEl>
+                                      </p:cBhvr>
+                                    </p:cmd>
+                                  </p:childTnLst>
+                                </p:cTn>
+                              </p:par>
+                            </p:childTnLst>
+                          </p:cTn>
+                        </p:par>
+                      </p:childTnLst>
+                    </p:cTn>
+                  </p:par>
+                </p:childTnLst>
+              </p:cTn>
+              <p:nextCondLst>
+                <p:cond evt="onClick" delay="0">
+                  <p:tgtEl>
+                    <p:spTgt spid="6"/>
+                  </p:tgtEl>
+                </p:cond>
+              </p:nextCondLst>
+            </p:seq>
+          </p:childTnLst>
+        </p:cTn>
+      </p:par>
+    </p:tnLst>
+  </p:timing>
 </p:sld>
 </file>
 
